--- a/public/fun/pack/pptx/birthdaypro/돌잔치프리미엄_01_성장기록중심_아이보리로즈골드.pptx
+++ b/public/fun/pack/pptx/birthdaypro/돌잔치프리미엄_01_성장기록중심_아이보리로즈골드.pptx
@@ -112,12 +112,12 @@
   <p:extLst>
     <p:ext uri="{521415D9-36F7-43E2-AB2F-B90AF26B5E84}">
       <p14:sectionLst xmlns:p14="http://schemas.microsoft.com/office/powerpoint/2010/main">
-        <p14:section name="시작" id="{FA35F7A1-6769-40B6-B6DE-CFD774976D65}">
+        <p14:section name="시작" id="{F44EB3DF-0542-44DA-ADAA-70C0ACBC241C}">
           <p14:sldIdLst>
             <p14:sldId id="256"/>
           </p14:sldIdLst>
         </p14:section>
-        <p14:section name="본문" id="{E0F9A1B5-C3C0-436F-8659-D96E23BDCD6D}">
+        <p14:section name="본문" id="{C5318238-6C3A-4D15-AC8C-F5D1F4D0A306}">
           <p14:sldIdLst>
             <p14:sldId id="257"/>
             <p14:sldId id="258"/>
@@ -125,7 +125,7 @@
             <p14:sldId id="260"/>
           </p14:sldIdLst>
         </p14:section>
-        <p14:section name="마무리" id="{2821329D-B173-446B-ACB6-B90B3033D677}">
+        <p14:section name="마무리" id="{6CA73780-265B-416B-A8D3-C70BB7411DC4}">
           <p14:sldIdLst>
             <p14:sldId id="261"/>
           </p14:sldIdLst>
@@ -1714,7 +1714,7 @@
             </a:lvl1pPr>
           </a:lstStyle>
           <a:p>
-            <a:fld id="{EA1A0D72-6BE5-4863-B08D-4381EC693981}" type="slidenum">
+            <a:fld id="{EC0830B3-C94E-4B20-9197-175D7ACE549B}" type="slidenum">
               <a:rPr lang="en-US"/>
               <a:t>‹#›</a:t>
             </a:fld>
@@ -2543,7 +2543,7 @@
             </a:lvl1pPr>
           </a:lstStyle>
           <a:p>
-            <a:fld id="{EA530803-18DB-4591-A1FB-FD56B408957F}" type="slidenum">
+            <a:fld id="{2171C029-53E4-4F09-82D3-45659E26CC0F}" type="slidenum">
               <a:rPr lang="en-US"/>
               <a:t>‹#›</a:t>
             </a:fld>
@@ -3299,7 +3299,7 @@
             </a:lvl1pPr>
           </a:lstStyle>
           <a:p>
-            <a:fld id="{A6958D0F-2390-467B-86D9-47F0FCF0630E}" type="slidenum">
+            <a:fld id="{B809734A-2725-4DA4-BA90-17EB10C232F9}" type="slidenum">
               <a:rPr lang="en-US"/>
               <a:t>‹#›</a:t>
             </a:fld>
@@ -4254,7 +4254,7 @@
           <a:p>
             <a:r>
               <a:rPr lang="ko-KR"/>
-              <a:t>열두 달 동안 이만큼 자랐습니다</a:t>
+              <a:t>지금까지 이만큼 자랐습니다</a:t>
             </a:r>
           </a:p>
         </p:txBody>
@@ -4276,7 +4276,7 @@
           <a:p>
             <a:r>
               <a:rPr lang="ko-KR"/>
-              <a:t>아기 이름 · 0000. 00. 00</a:t>
+              <a:t>아기 이름 · 날짜 입력</a:t>
             </a:r>
           </a:p>
           <a:p>
@@ -4437,7 +4437,7 @@
           <a:bodyPr/>
           <a:lstStyle/>
           <a:p>
-            <a:fld id="{BD2DE353-ECB1-4770-96A4-1517F0808894}" type="slidenum">
+            <a:fld id="{5168C676-9548-4C84-9F6D-12FFF01586D7}" type="slidenum">
               <a:rPr lang="en-US"/>
               <a:t>‹#›</a:t>
             </a:fld>
@@ -5037,7 +5037,7 @@
           <a:bodyPr/>
           <a:lstStyle/>
           <a:p>
-            <a:fld id="{E186F83B-3273-4267-BB50-6C1C13D0B208}" type="slidenum">
+            <a:fld id="{C1793141-99C5-4970-AE1E-B520F76249C6}" type="slidenum">
               <a:rPr lang="en-US"/>
               <a:t>‹#›</a:t>
             </a:fld>
@@ -6218,7 +6218,7 @@
           <a:bodyPr/>
           <a:lstStyle/>
           <a:p>
-            <a:fld id="{2A75F0DF-8ABB-4F95-97C4-713800E336C6}" type="slidenum">
+            <a:fld id="{E0E87BC1-5439-4830-9FF7-CE74963F004B}" type="slidenum">
               <a:rPr lang="en-US"/>
               <a:t>‹#›</a:t>
             </a:fld>
@@ -6893,7 +6893,7 @@
           <a:bodyPr/>
           <a:lstStyle/>
           <a:p>
-            <a:fld id="{915345B7-D8EE-4D3E-9394-043A0EEBAC29}" type="slidenum">
+            <a:fld id="{27E070ED-38A8-4A9D-996C-328C7EEA8840}" type="slidenum">
               <a:rPr lang="en-US"/>
               <a:t>‹#›</a:t>
             </a:fld>
